--- a/genai.pptx
+++ b/genai.pptx
@@ -108,6 +108,11 @@
       </a:defRPr>
     </a:lvl9pPr>
   </p:defaultTextStyle>
+  <p:extLst>
+    <p:ext uri="{EFAFB233-063F-42B5-8137-9DF3F51BA10A}">
+      <p15:sldGuideLst xmlns:p15="http://schemas.microsoft.com/office/powerpoint/2012/main"/>
+    </p:ext>
+  </p:extLst>
 </p:presentation>
 </file>
 
@@ -4517,42 +4522,70 @@
             </a:r>
           </a:p>
           <a:p>
+            <a:pPr marL="285750" indent="-285750">
+              <a:buFont typeface="Arial" panose="020B0604020202020204" pitchFamily="34" charset="0"/>
+              <a:buChar char="•"/>
+            </a:pPr>
             <a:r>
               <a:rPr lang="en-IN" dirty="0"/>
               <a:t>User uploads a document.</a:t>
             </a:r>
           </a:p>
           <a:p>
+            <a:pPr marL="285750" indent="-285750">
+              <a:buFont typeface="Arial" panose="020B0604020202020204" pitchFamily="34" charset="0"/>
+              <a:buChar char="•"/>
+            </a:pPr>
             <a:r>
               <a:rPr lang="en-IN" dirty="0"/>
               <a:t>Document is stored in S3.</a:t>
             </a:r>
           </a:p>
           <a:p>
+            <a:pPr marL="285750" indent="-285750">
+              <a:buFont typeface="Arial" panose="020B0604020202020204" pitchFamily="34" charset="0"/>
+              <a:buChar char="•"/>
+            </a:pPr>
             <a:r>
               <a:rPr lang="en-IN" dirty="0"/>
               <a:t>Text is parsed, chunked, embedded, and indexed.</a:t>
             </a:r>
           </a:p>
           <a:p>
+            <a:pPr marL="285750" indent="-285750">
+              <a:buFont typeface="Arial" panose="020B0604020202020204" pitchFamily="34" charset="0"/>
+              <a:buChar char="•"/>
+            </a:pPr>
             <a:r>
               <a:rPr lang="en-IN" dirty="0"/>
               <a:t>The user asks a question.</a:t>
             </a:r>
           </a:p>
           <a:p>
+            <a:pPr marL="285750" indent="-285750">
+              <a:buFont typeface="Arial" panose="020B0604020202020204" pitchFamily="34" charset="0"/>
+              <a:buChar char="•"/>
+            </a:pPr>
             <a:r>
               <a:rPr lang="en-IN" dirty="0"/>
               <a:t>The system retrieves the most relevant chunks.</a:t>
             </a:r>
           </a:p>
           <a:p>
+            <a:pPr marL="285750" indent="-285750">
+              <a:buFont typeface="Arial" panose="020B0604020202020204" pitchFamily="34" charset="0"/>
+              <a:buChar char="•"/>
+            </a:pPr>
             <a:r>
               <a:rPr lang="en-IN" dirty="0"/>
               <a:t>A prompt is created with the retrieved context.</a:t>
             </a:r>
           </a:p>
           <a:p>
+            <a:pPr marL="285750" indent="-285750">
+              <a:buFont typeface="Arial" panose="020B0604020202020204" pitchFamily="34" charset="0"/>
+              <a:buChar char="•"/>
+            </a:pPr>
             <a:r>
               <a:rPr lang="en-IN" dirty="0"/>
               <a:t>Amazon Bedrock generates the final answer.</a:t>
